--- a/public/fun/pack/pptx/talkpro/발표템플릿프리미엄_28_업무보고_올리브브론즈.pptx
+++ b/public/fun/pack/pptx/talkpro/발표템플릿프리미엄_28_업무보고_올리브브론즈.pptx
@@ -115,12 +115,12 @@
   <p:extLst>
     <p:ext uri="{521415D9-36F7-43E2-AB2F-B90AF26B5E84}">
       <p14:sectionLst xmlns:p14="http://schemas.microsoft.com/office/powerpoint/2010/main">
-        <p14:section name="시작" id="{28BA160B-BA6C-4B29-8A9D-733BB4D363C6}">
+        <p14:section name="시작" id="{3E370346-780A-4B00-BC3E-409F040E83FA}">
           <p14:sldIdLst>
             <p14:sldId id="256"/>
           </p14:sldIdLst>
         </p14:section>
-        <p14:section name="본문" id="{20CDDB1F-1705-4C31-B976-683EB1071B51}">
+        <p14:section name="본문" id="{1509D110-6D6D-44A2-B7FC-54EF5646BB38}">
           <p14:sldIdLst>
             <p14:sldId id="257"/>
             <p14:sldId id="258"/>
@@ -131,7 +131,7 @@
             <p14:sldId id="263"/>
           </p14:sldIdLst>
         </p14:section>
-        <p14:section name="마무리" id="{89C4FEFD-735D-4AA8-A769-B0E18E2B486D}">
+        <p14:section name="마무리" id="{9DB66663-2D70-451A-ABED-C4760755A279}">
           <p14:sldIdLst>
             <p14:sldId id="264"/>
           </p14:sldIdLst>
@@ -3385,7 +3385,7 @@
             </a:lvl1pPr>
           </a:lstStyle>
           <a:p>
-            <a:fld id="{42DC08F3-6411-4C98-B96B-5F47DD7BD27F}" type="slidenum">
+            <a:fld id="{D5308F7D-A4D8-4195-A8C9-ECE53CB0F667}" type="slidenum">
               <a:rPr lang="en-US"/>
               <a:t>‹#›</a:t>
             </a:fld>
@@ -5561,7 +5561,7 @@
             </a:lvl1pPr>
           </a:lstStyle>
           <a:p>
-            <a:fld id="{A061CEB3-1D7D-47A5-B43C-6B4E442E4737}" type="slidenum">
+            <a:fld id="{1A3F4021-D925-414D-A06C-6E6303704756}" type="slidenum">
               <a:rPr lang="en-US"/>
               <a:t>‹#›</a:t>
             </a:fld>
@@ -6231,7 +6231,7 @@
             </a:lvl1pPr>
           </a:lstStyle>
           <a:p>
-            <a:fld id="{5F40EEE8-8E98-4CC0-972F-B0A19D5A6B60}" type="slidenum">
+            <a:fld id="{E7752777-FB9F-4A15-AD15-488D9E05B39D}" type="slidenum">
               <a:rPr lang="en-US"/>
               <a:t>‹#›</a:t>
             </a:fld>
@@ -7072,7 +7072,7 @@
           <a:p>
             <a:r>
               <a:rPr lang="ko-KR"/>
-              <a:t>하반기 계획과 진행률입니다</a:t>
+              <a:t>앞으로의 계획과 진행률입니다</a:t>
             </a:r>
           </a:p>
         </p:txBody>
@@ -7100,7 +7100,7 @@
           <a:p>
             <a:r>
               <a:rPr lang="ko-KR"/>
-              <a:t>0000. 00. 00</a:t>
+              <a:t>날짜 입력</a:t>
             </a:r>
           </a:p>
         </p:txBody>
@@ -7185,7 +7185,7 @@
           <a:bodyPr/>
           <a:lstStyle/>
           <a:p>
-            <a:fld id="{EC024A9B-0E25-477D-9C2C-ACC4B5FA92E7}" type="slidenum">
+            <a:fld id="{10BEBC55-358E-4CA6-BF5E-A0F5E1C1B2AF}" type="slidenum">
               <a:rPr lang="en-US"/>
               <a:t>‹#›</a:t>
             </a:fld>
@@ -8359,7 +8359,7 @@
           <a:bodyPr/>
           <a:lstStyle/>
           <a:p>
-            <a:fld id="{3754AC41-7D37-4544-AFF6-1D458DB561EA}" type="slidenum">
+            <a:fld id="{CB85124E-A579-4867-884D-736278614CCB}" type="slidenum">
               <a:rPr lang="en-US"/>
               <a:t>‹#›</a:t>
             </a:fld>
@@ -8447,7 +8447,7 @@
           <a:bodyPr/>
           <a:lstStyle/>
           <a:p>
-            <a:fld id="{3075B126-3523-4BAA-AE54-418DA187AB93}" type="slidenum">
+            <a:fld id="{EC2F2BD6-BB9F-4249-8D64-6B6AABE116C4}" type="slidenum">
               <a:rPr lang="en-US"/>
               <a:t>‹#›</a:t>
             </a:fld>
@@ -9399,7 +9399,7 @@
           <a:bodyPr/>
           <a:lstStyle/>
           <a:p>
-            <a:fld id="{8255C456-B9C5-42FC-95D2-B23A562D4A2B}" type="slidenum">
+            <a:fld id="{8925D92D-5854-46A2-89AC-EF8A0F0CE166}" type="slidenum">
               <a:rPr lang="en-US"/>
               <a:t>‹#›</a:t>
             </a:fld>
@@ -10039,7 +10039,7 @@
           <a:bodyPr/>
           <a:lstStyle/>
           <a:p>
-            <a:fld id="{42561641-4892-43E7-9DA1-068B85AD2069}" type="slidenum">
+            <a:fld id="{14AB0B93-E6FB-4863-AAE5-4B5E08CA210E}" type="slidenum">
               <a:rPr lang="en-US"/>
               <a:t>‹#›</a:t>
             </a:fld>
@@ -10222,7 +10222,7 @@
           <a:bodyPr/>
           <a:lstStyle/>
           <a:p>
-            <a:fld id="{CC067AA1-A487-49CE-B8D8-FB2D02EF05E5}" type="slidenum">
+            <a:fld id="{3141AF07-FD9C-4FD6-B3A9-2169C87A7922}" type="slidenum">
               <a:rPr lang="en-US"/>
               <a:t>‹#›</a:t>
             </a:fld>
@@ -11286,7 +11286,7 @@
           <a:bodyPr/>
           <a:lstStyle/>
           <a:p>
-            <a:fld id="{3CFF5130-0BA0-4E29-9118-B5CE994837E1}" type="slidenum">
+            <a:fld id="{8EC7D4CE-E9BE-4568-822E-BAA4C8A69FEF}" type="slidenum">
               <a:rPr lang="en-US"/>
               <a:t>‹#›</a:t>
             </a:fld>
